--- a/dataset/guides_final/ACC/guide/IT-ACC-002_비밀번호 변경·초기화 가이드.pptx
+++ b/dataset/guides_final/ACC/guide/IT-ACC-002_비밀번호 변경·초기화 가이드.pptx
@@ -3242,7 +3242,7 @@
                 <a:ea typeface="Malgun Gothic"/>
                 <a:cs typeface="Malgun Gothic"/>
               </a:rPr>
-              <a:t>한화시스템 ICT 임직원 IT 안내 · 계정·로그인</a:t>
+              <a:t>가상 ICT 기업 임직원 IT 안내 · 계정·로그인</a:t>
             </a:r>
           </a:p>
         </p:txBody>
@@ -3474,7 +3474,7 @@
                 <a:ea typeface="Malgun Gothic"/>
                 <a:cs typeface="Malgun Gothic"/>
               </a:rPr>
-              <a:t>© HANWHA SYSTEMS ICT · IT-ACC-002 · 사내 일반</a:t>
+              <a:t>© 가상 ICT 기업 · IT-ACC-002 · 사내 일반</a:t>
             </a:r>
           </a:p>
         </p:txBody>
@@ -5448,7 +5448,7 @@
                 <a:ea typeface="Malgun Gothic"/>
                 <a:cs typeface="Malgun Gothic"/>
               </a:rPr>
-              <a:t>© HANWHA SYSTEMS ICT · IT-ACC-002 · 사내 일반</a:t>
+              <a:t>© 가상 ICT 기업 · IT-ACC-002 · 사내 일반</a:t>
             </a:r>
           </a:p>
         </p:txBody>
@@ -7511,7 +7511,7 @@
                 <a:ea typeface="Malgun Gothic"/>
                 <a:cs typeface="Malgun Gothic"/>
               </a:rPr>
-              <a:t>© HANWHA SYSTEMS ICT · IT-ACC-002 · 사내 일반</a:t>
+              <a:t>© 가상 ICT 기업 · IT-ACC-002 · 사내 일반</a:t>
             </a:r>
           </a:p>
         </p:txBody>
@@ -8942,7 +8942,7 @@
                 <a:ea typeface="Malgun Gothic"/>
                 <a:cs typeface="Malgun Gothic"/>
               </a:rPr>
-              <a:t>© HANWHA SYSTEMS ICT · IT-ACC-002 · 사내 일반</a:t>
+              <a:t>© 가상 ICT 기업 · IT-ACC-002 · 사내 일반</a:t>
             </a:r>
           </a:p>
         </p:txBody>
@@ -10935,7 +10935,7 @@
                 <a:ea typeface="Malgun Gothic"/>
                 <a:cs typeface="Malgun Gothic"/>
               </a:rPr>
-              <a:t>© HANWHA SYSTEMS ICT · IT-ACC-002 · 사내 일반</a:t>
+              <a:t>© 가상 ICT 기업 · IT-ACC-002 · 사내 일반</a:t>
             </a:r>
           </a:p>
         </p:txBody>
@@ -12344,7 +12344,7 @@
                 <a:ea typeface="Malgun Gothic"/>
                 <a:cs typeface="Malgun Gothic"/>
               </a:rPr>
-              <a:t>© HANWHA SYSTEMS ICT · IT-ACC-002 · 사내 일반</a:t>
+              <a:t>© 가상 ICT 기업 · IT-ACC-002 · 사내 일반</a:t>
             </a:r>
           </a:p>
         </p:txBody>
@@ -14291,7 +14291,7 @@
                 <a:ea typeface="Malgun Gothic"/>
                 <a:cs typeface="Malgun Gothic"/>
               </a:rPr>
-              <a:t>© HANWHA SYSTEMS ICT · IT-ACC-002 · 사내 일반</a:t>
+              <a:t>© 가상 ICT 기업 · IT-ACC-002 · 사내 일반</a:t>
             </a:r>
           </a:p>
         </p:txBody>
@@ -15696,7 +15696,7 @@
                 <a:ea typeface="Malgun Gothic"/>
                 <a:cs typeface="Malgun Gothic"/>
               </a:rPr>
-              <a:t>© HANWHA SYSTEMS ICT · IT-ACC-002 · 사내 일반</a:t>
+              <a:t>© 가상 ICT 기업 · IT-ACC-002 · 사내 일반</a:t>
             </a:r>
           </a:p>
         </p:txBody>
@@ -17807,7 +17807,7 @@
                 <a:ea typeface="Malgun Gothic"/>
                 <a:cs typeface="Malgun Gothic"/>
               </a:rPr>
-              <a:t>© HANWHA SYSTEMS ICT · IT-ACC-002 · 사내 일반</a:t>
+              <a:t>© 가상 ICT 기업 · IT-ACC-002 · 사내 일반</a:t>
             </a:r>
           </a:p>
         </p:txBody>
@@ -19125,7 +19125,7 @@
                 <a:ea typeface="Malgun Gothic"/>
                 <a:cs typeface="Malgun Gothic"/>
               </a:rPr>
-              <a:t>© HANWHA SYSTEMS ICT · IT-ACC-002 · 사내 일반</a:t>
+              <a:t>© 가상 ICT 기업 · IT-ACC-002 · 사내 일반</a:t>
             </a:r>
           </a:p>
         </p:txBody>
@@ -21168,7 +21168,7 @@
                 <a:ea typeface="Malgun Gothic"/>
                 <a:cs typeface="Malgun Gothic"/>
               </a:rPr>
-              <a:t>© HANWHA SYSTEMS ICT · IT-ACC-002 · 사내 일반</a:t>
+              <a:t>© 가상 ICT 기업 · IT-ACC-002 · 사내 일반</a:t>
             </a:r>
           </a:p>
         </p:txBody>
@@ -22997,7 +22997,7 @@
                 <a:ea typeface="Malgun Gothic"/>
                 <a:cs typeface="Malgun Gothic"/>
               </a:rPr>
-              <a:t>© HANWHA SYSTEMS ICT · IT-ACC-002 · 사내 일반</a:t>
+              <a:t>© 가상 ICT 기업 · IT-ACC-002 · 사내 일반</a:t>
             </a:r>
           </a:p>
         </p:txBody>
@@ -24477,7 +24477,7 @@
                 <a:ea typeface="Malgun Gothic"/>
                 <a:cs typeface="Malgun Gothic"/>
               </a:rPr>
-              <a:t>© HANWHA SYSTEMS ICT · IT-ACC-002 · 사내 일반</a:t>
+              <a:t>© 가상 ICT 기업 · IT-ACC-002 · 사내 일반</a:t>
             </a:r>
           </a:p>
         </p:txBody>
@@ -24725,7 +24725,7 @@
                 <a:ea typeface="Malgun Gothic"/>
                 <a:cs typeface="Malgun Gothic"/>
               </a:rPr>
-              <a:t>© HANWHA SYSTEMS ICT · IT-ACC-002 · 사내 일반</a:t>
+              <a:t>© 가상 ICT 기업 · IT-ACC-002 · 사내 일반</a:t>
             </a:r>
           </a:p>
         </p:txBody>
@@ -24976,7 +24976,7 @@
         </p:nvGraphicFramePr>
         <p:xfrm>
           <a:off x="584200" y="1168400"/>
-          <a:ext cx="11023600" cy="1790700"/>
+          <a:ext cx="11023600" cy="1625600"/>
         </p:xfrm>
         <a:graphic>
           <a:graphicData uri="http://schemas.openxmlformats.org/drawingml/2006/table">
@@ -25100,7 +25100,7 @@
                   </a:tcPr>
                 </a:tc>
               </a:tr>
-              <a:tr h="622300">
+              <a:tr h="457200">
                 <a:tc>
                   <a:txBody>
                     <a:bodyPr wrap="none" lIns="0" rIns="0" tIns="0" bIns="0" anchor="t"/>
@@ -25181,7 +25181,7 @@
                           <a:ea typeface="Malgun Gothic"/>
                           <a:cs typeface="Malgun Gothic"/>
                         </a:rPr>
-                        <a:t>셀프 비밀번호 재설정 포털(password.hanwha-ict.example)에서 사번과 휴대폰 인증으로 직접 재설정할 수 있습니다.</a:t>
+                        <a:t>셀프 비밀번호 재설정 포털(password.ict.example)에서 사번과 휴대폰 인증으로 직접 재설정할 수 있습니다. 비밀번호는 12자</a:t>
                       </a:r>
                     </a:p>
                     <a:p>
@@ -25205,31 +25205,7 @@
                           <a:ea typeface="Malgun Gothic"/>
                           <a:cs typeface="Malgun Gothic"/>
                         </a:rPr>
-                        <a:t>비밀번호는 12자 이상, 대·소문자·숫자·특수문자를 모두 포함해야 하며 최근 5개는 재사용할 수 없습니다. 90일마다 변경이</a:t>
-                      </a:r>
-                    </a:p>
-                    <a:p>
-                      <a:pPr algn="l">
-                        <a:lnSpc>
-                          <a:spcPts val="1300"/>
-                        </a:lnSpc>
-                        <a:spcBef>
-                          <a:spcPts val="0"/>
-                        </a:spcBef>
-                        <a:spcAft>
-                          <a:spcPts val="0"/>
-                        </a:spcAft>
-                      </a:pPr>
-                      <a:r>
-                        <a:rPr sz="1000" b="0">
-                          <a:solidFill>
-                            <a:srgbClr val="1D2433"/>
-                          </a:solidFill>
-                          <a:latin typeface="Malgun Gothic"/>
-                          <a:ea typeface="Malgun Gothic"/>
-                          <a:cs typeface="Malgun Gothic"/>
-                        </a:rPr>
-                        <a:t>필요합니다.</a:t>
+                        <a:t>이상, 대·소문자·숫자·특수문자를 모두 포함해야 하며 최근 5개는 재사용할 수 없습니다. 90일마다 변경이 필요합니다.</a:t>
                       </a:r>
                     </a:p>
                   </a:txBody>
@@ -25642,7 +25618,7 @@
                 <a:ea typeface="Malgun Gothic"/>
                 <a:cs typeface="Malgun Gothic"/>
               </a:rPr>
-              <a:t>© HANWHA SYSTEMS ICT · IT-ACC-002 · 사내 일반</a:t>
+              <a:t>© 가상 ICT 기업 · IT-ACC-002 · 사내 일반</a:t>
             </a:r>
           </a:p>
         </p:txBody>
@@ -25890,7 +25866,7 @@
                 <a:ea typeface="Malgun Gothic"/>
                 <a:cs typeface="Malgun Gothic"/>
               </a:rPr>
-              <a:t>© HANWHA SYSTEMS ICT · IT-ACC-002 · 사내 일반</a:t>
+              <a:t>© 가상 ICT 기업 · IT-ACC-002 · 사내 일반</a:t>
             </a:r>
           </a:p>
         </p:txBody>
@@ -26641,7 +26617,7 @@
                 <a:ea typeface="Malgun Gothic"/>
                 <a:cs typeface="Malgun Gothic"/>
               </a:rPr>
-              <a:t>© HANWHA SYSTEMS ICT · IT-ACC-002 · 사내 일반</a:t>
+              <a:t>© 가상 ICT 기업 · IT-ACC-002 · 사내 일반</a:t>
             </a:r>
           </a:p>
         </p:txBody>
@@ -26889,7 +26865,7 @@
                 <a:ea typeface="Malgun Gothic"/>
                 <a:cs typeface="Malgun Gothic"/>
               </a:rPr>
-              <a:t>© HANWHA SYSTEMS ICT · IT-ACC-002 · 사내 일반</a:t>
+              <a:t>© 가상 ICT 기업 · IT-ACC-002 · 사내 일반</a:t>
             </a:r>
           </a:p>
         </p:txBody>
@@ -27401,7 +27377,7 @@
                           <a:ea typeface="Malgun Gothic"/>
                           <a:cs typeface="Malgun Gothic"/>
                         </a:rPr>
-                        <a:t>사내 IT 포털(hanwha-admin) 상단 [챗봇 문의]</a:t>
+                        <a:t>사내 IT 포털 상단 [챗봇 문의]</a:t>
                       </a:r>
                     </a:p>
                   </a:txBody>
@@ -28093,7 +28069,7 @@
                           <a:ea typeface="Malgun Gothic"/>
                           <a:cs typeface="Malgun Gothic"/>
                         </a:rPr>
-                        <a:t>it-helpdesk@hanwha-ict.example</a:t>
+                        <a:t>it-helpdesk@ict.example</a:t>
                       </a:r>
                     </a:p>
                   </a:txBody>
@@ -28392,7 +28368,7 @@
                 <a:ea typeface="Malgun Gothic"/>
                 <a:cs typeface="Malgun Gothic"/>
               </a:rPr>
-              <a:t>© HANWHA SYSTEMS ICT · IT-ACC-002 · 사내 일반</a:t>
+              <a:t>© 가상 ICT 기업 · IT-ACC-002 · 사내 일반</a:t>
             </a:r>
           </a:p>
         </p:txBody>
@@ -28640,7 +28616,7 @@
                 <a:ea typeface="Malgun Gothic"/>
                 <a:cs typeface="Malgun Gothic"/>
               </a:rPr>
-              <a:t>© HANWHA SYSTEMS ICT · IT-ACC-002 · 사내 일반</a:t>
+              <a:t>© 가상 ICT 기업 · IT-ACC-002 · 사내 일반</a:t>
             </a:r>
           </a:p>
         </p:txBody>
@@ -30632,7 +30608,7 @@
                 <a:ea typeface="Malgun Gothic"/>
                 <a:cs typeface="Malgun Gothic"/>
               </a:rPr>
-              <a:t>© HANWHA SYSTEMS ICT · IT-ACC-002 · 사내 일반</a:t>
+              <a:t>© 가상 ICT 기업 · IT-ACC-002 · 사내 일반</a:t>
             </a:r>
           </a:p>
         </p:txBody>
@@ -32077,7 +32053,7 @@
                 <a:ea typeface="Malgun Gothic"/>
                 <a:cs typeface="Malgun Gothic"/>
               </a:rPr>
-              <a:t>© HANWHA SYSTEMS ICT · IT-ACC-002 · 사내 일반</a:t>
+              <a:t>© 가상 ICT 기업 · IT-ACC-002 · 사내 일반</a:t>
             </a:r>
           </a:p>
         </p:txBody>
@@ -33353,7 +33329,7 @@
                 <a:ea typeface="Malgun Gothic"/>
                 <a:cs typeface="Malgun Gothic"/>
               </a:rPr>
-              <a:t>© HANWHA SYSTEMS ICT · IT-ACC-002 · 사내 일반</a:t>
+              <a:t>© 가상 ICT 기업 · IT-ACC-002 · 사내 일반</a:t>
             </a:r>
           </a:p>
         </p:txBody>
@@ -33601,7 +33577,7 @@
                 <a:ea typeface="Malgun Gothic"/>
                 <a:cs typeface="Malgun Gothic"/>
               </a:rPr>
-              <a:t>© HANWHA SYSTEMS ICT · IT-ACC-002 · 사내 일반</a:t>
+              <a:t>© 가상 ICT 기업 · IT-ACC-002 · 사내 일반</a:t>
             </a:r>
           </a:p>
         </p:txBody>
@@ -34966,7 +34942,7 @@
                 <a:ea typeface="Malgun Gothic"/>
                 <a:cs typeface="Malgun Gothic"/>
               </a:rPr>
-              <a:t>https://password.hanwha-ict.example</a:t>
+              <a:t>https://password.ict.example</a:t>
             </a:r>
           </a:p>
         </p:txBody>
@@ -35201,7 +35177,7 @@
                 <a:ea typeface="Malgun Gothic"/>
                 <a:cs typeface="Malgun Gothic"/>
               </a:rPr>
-              <a:t>© HANWHA SYSTEMS ICT · IT-ACC-002 · 사내 일반</a:t>
+              <a:t>© 가상 ICT 기업 · IT-ACC-002 · 사내 일반</a:t>
             </a:r>
           </a:p>
         </p:txBody>
@@ -35449,7 +35425,7 @@
                 <a:ea typeface="Malgun Gothic"/>
                 <a:cs typeface="Malgun Gothic"/>
               </a:rPr>
-              <a:t>© HANWHA SYSTEMS ICT · IT-ACC-002 · 사내 일반</a:t>
+              <a:t>© 가상 ICT 기업 · IT-ACC-002 · 사내 일반</a:t>
             </a:r>
           </a:p>
         </p:txBody>
@@ -37052,7 +37028,7 @@
                           <a:ea typeface="Malgun Gothic"/>
                           <a:cs typeface="Malgun Gothic"/>
                         </a:rPr>
-                        <a:t>Hanwha2026!!</a:t>
+                        <a:t>Ict2026!!</a:t>
                       </a:r>
                     </a:p>
                   </a:txBody>
@@ -37406,7 +37382,7 @@
                 <a:ea typeface="Malgun Gothic"/>
                 <a:cs typeface="Malgun Gothic"/>
               </a:rPr>
-              <a:t>© HANWHA SYSTEMS ICT · IT-ACC-002 · 사내 일반</a:t>
+              <a:t>© 가상 ICT 기업 · IT-ACC-002 · 사내 일반</a:t>
             </a:r>
           </a:p>
         </p:txBody>
@@ -39099,7 +39075,7 @@
                 <a:ea typeface="Malgun Gothic"/>
                 <a:cs typeface="Malgun Gothic"/>
               </a:rPr>
-              <a:t>© HANWHA SYSTEMS ICT · IT-ACC-002 · 사내 일반</a:t>
+              <a:t>© 가상 ICT 기업 · IT-ACC-002 · 사내 일반</a:t>
             </a:r>
           </a:p>
         </p:txBody>
@@ -39347,7 +39323,7 @@
                 <a:ea typeface="Malgun Gothic"/>
                 <a:cs typeface="Malgun Gothic"/>
               </a:rPr>
-              <a:t>© HANWHA SYSTEMS ICT · IT-ACC-002 · 사내 일반</a:t>
+              <a:t>© 가상 ICT 기업 · IT-ACC-002 · 사내 일반</a:t>
             </a:r>
           </a:p>
         </p:txBody>
